--- a/FSD lab.pptx
+++ b/FSD lab.pptx
@@ -278,7 +278,7 @@
           <a:p>
             <a:fld id="{14299CBD-7B76-4620-9789-EBFD3C0EF09B}" type="datetimeFigureOut">
               <a:rPr lang="en-IN" smtClean="0"/>
-              <a:t>19-07-2026</a:t>
+              <a:t>26-07-2026</a:t>
             </a:fld>
             <a:endParaRPr lang="en-IN"/>
           </a:p>
@@ -478,7 +478,7 @@
           <a:p>
             <a:fld id="{14299CBD-7B76-4620-9789-EBFD3C0EF09B}" type="datetimeFigureOut">
               <a:rPr lang="en-IN" smtClean="0"/>
-              <a:t>19-07-2026</a:t>
+              <a:t>26-07-2026</a:t>
             </a:fld>
             <a:endParaRPr lang="en-IN"/>
           </a:p>
@@ -688,7 +688,7 @@
           <a:p>
             <a:fld id="{14299CBD-7B76-4620-9789-EBFD3C0EF09B}" type="datetimeFigureOut">
               <a:rPr lang="en-IN" smtClean="0"/>
-              <a:t>19-07-2026</a:t>
+              <a:t>26-07-2026</a:t>
             </a:fld>
             <a:endParaRPr lang="en-IN"/>
           </a:p>
@@ -888,7 +888,7 @@
           <a:p>
             <a:fld id="{14299CBD-7B76-4620-9789-EBFD3C0EF09B}" type="datetimeFigureOut">
               <a:rPr lang="en-IN" smtClean="0"/>
-              <a:t>19-07-2026</a:t>
+              <a:t>26-07-2026</a:t>
             </a:fld>
             <a:endParaRPr lang="en-IN"/>
           </a:p>
@@ -1164,7 +1164,7 @@
           <a:p>
             <a:fld id="{14299CBD-7B76-4620-9789-EBFD3C0EF09B}" type="datetimeFigureOut">
               <a:rPr lang="en-IN" smtClean="0"/>
-              <a:t>19-07-2026</a:t>
+              <a:t>26-07-2026</a:t>
             </a:fld>
             <a:endParaRPr lang="en-IN"/>
           </a:p>
@@ -1432,7 +1432,7 @@
           <a:p>
             <a:fld id="{14299CBD-7B76-4620-9789-EBFD3C0EF09B}" type="datetimeFigureOut">
               <a:rPr lang="en-IN" smtClean="0"/>
-              <a:t>19-07-2026</a:t>
+              <a:t>26-07-2026</a:t>
             </a:fld>
             <a:endParaRPr lang="en-IN"/>
           </a:p>
@@ -1847,7 +1847,7 @@
           <a:p>
             <a:fld id="{14299CBD-7B76-4620-9789-EBFD3C0EF09B}" type="datetimeFigureOut">
               <a:rPr lang="en-IN" smtClean="0"/>
-              <a:t>19-07-2026</a:t>
+              <a:t>26-07-2026</a:t>
             </a:fld>
             <a:endParaRPr lang="en-IN"/>
           </a:p>
@@ -1989,7 +1989,7 @@
           <a:p>
             <a:fld id="{14299CBD-7B76-4620-9789-EBFD3C0EF09B}" type="datetimeFigureOut">
               <a:rPr lang="en-IN" smtClean="0"/>
-              <a:t>19-07-2026</a:t>
+              <a:t>26-07-2026</a:t>
             </a:fld>
             <a:endParaRPr lang="en-IN"/>
           </a:p>
@@ -2102,7 +2102,7 @@
           <a:p>
             <a:fld id="{14299CBD-7B76-4620-9789-EBFD3C0EF09B}" type="datetimeFigureOut">
               <a:rPr lang="en-IN" smtClean="0"/>
-              <a:t>19-07-2026</a:t>
+              <a:t>26-07-2026</a:t>
             </a:fld>
             <a:endParaRPr lang="en-IN"/>
           </a:p>
@@ -2415,7 +2415,7 @@
           <a:p>
             <a:fld id="{14299CBD-7B76-4620-9789-EBFD3C0EF09B}" type="datetimeFigureOut">
               <a:rPr lang="en-IN" smtClean="0"/>
-              <a:t>19-07-2026</a:t>
+              <a:t>26-07-2026</a:t>
             </a:fld>
             <a:endParaRPr lang="en-IN"/>
           </a:p>
@@ -2704,7 +2704,7 @@
           <a:p>
             <a:fld id="{14299CBD-7B76-4620-9789-EBFD3C0EF09B}" type="datetimeFigureOut">
               <a:rPr lang="en-IN" smtClean="0"/>
-              <a:t>19-07-2026</a:t>
+              <a:t>26-07-2026</a:t>
             </a:fld>
             <a:endParaRPr lang="en-IN"/>
           </a:p>
@@ -2947,7 +2947,7 @@
           <a:p>
             <a:fld id="{14299CBD-7B76-4620-9789-EBFD3C0EF09B}" type="datetimeFigureOut">
               <a:rPr lang="en-IN" smtClean="0"/>
-              <a:t>19-07-2026</a:t>
+              <a:t>26-07-2026</a:t>
             </a:fld>
             <a:endParaRPr lang="en-IN"/>
           </a:p>
@@ -6044,8 +6044,13 @@
             </a:r>
             <a:r>
               <a:rPr lang="en-IN" dirty="0"/>
-              <a:t> install express</a:t>
-            </a:r>
+              <a:t> install express </a:t>
+            </a:r>
+            <a:r>
+              <a:rPr lang="en-IN" dirty="0" err="1"/>
+              <a:t>ejs</a:t>
+            </a:r>
+            <a:endParaRPr lang="en-IN" dirty="0"/>
           </a:p>
         </p:txBody>
       </p:sp>
